--- a/assets/pptx/catalog-705.pptx
+++ b/assets/pptx/catalog-705.pptx
@@ -3370,7 +3370,7 @@
                 <a:ea typeface="Ebrima"/>
                 <a:cs typeface="Ebrima"/>
               </a:rPr>
-              <a:t>አዝ ነፍሴ ወደ እሱ አደላ (5x)</a:t>
+              <a:t>አዝ ነፍሴ ወደ እሱ አደላ 5x</a:t>
             </a:r>
           </a:p>
           <a:p>
@@ -3388,7 +3388,7 @@
                 <a:ea typeface="Ebrima"/>
                 <a:cs typeface="Ebrima"/>
               </a:rPr>
-              <a:t>ነፍሴ ለእርሱ ቅርብ ነው (5x)</a:t>
+              <a:t>ነፍሴ ለእርሱ ቅርብ ነው 5x</a:t>
             </a:r>
           </a:p>
           <a:p>
@@ -3648,7 +3648,7 @@
                 <a:ea typeface="Ebrima"/>
                 <a:cs typeface="Ebrima"/>
               </a:rPr>
-              <a:t>ነፍሴ ያደላው ለእርሱ ነው (2x)</a:t>
+              <a:t>ነፍሴ ያደላው ለእርሱ ነው 2x</a:t>
             </a:r>
           </a:p>
           <a:p>
@@ -3666,7 +3666,7 @@
                 <a:ea typeface="Ebrima"/>
                 <a:cs typeface="Ebrima"/>
               </a:rPr>
-              <a:t>ልቤ ያደላው ለእርሱ ነው (3x)</a:t>
+              <a:t>ልቤ ያደላው ለእርሱ ነው 3x</a:t>
             </a:r>
           </a:p>
         </p:txBody>
@@ -3733,7 +3733,7 @@
                 <a:ea typeface="Ebrima"/>
                 <a:cs typeface="Ebrima"/>
               </a:rPr>
-              <a:t>አላይም ሌላውን አላይም ሌላውን አላይም (4x)</a:t>
+              <a:t>አላይም ሌላውን አላይም ሌላውን አላይም 4x</a:t>
             </a:r>
           </a:p>
           <a:p>
@@ -3805,7 +3805,7 @@
                 <a:ea typeface="Ebrima"/>
                 <a:cs typeface="Ebrima"/>
               </a:rPr>
-              <a:t>ከዚህ በላይ በላይ ክበርልኝ/ንገስልኝ (2x)</a:t>
+              <a:t>ከዚህ በላይ በላይ ክበርልኝ/ንገስልኝ 2x</a:t>
             </a:r>
           </a:p>
         </p:txBody>
@@ -3872,7 +3872,7 @@
                 <a:ea typeface="Ebrima"/>
                 <a:cs typeface="Ebrima"/>
               </a:rPr>
-              <a:t>አላይም ሌላውን አላይም ሌላውን አላይም (4x)</a:t>
+              <a:t>አላይም ሌላውን አላይም ሌላውን አላይም 4x</a:t>
             </a:r>
           </a:p>
           <a:p>
@@ -3926,7 +3926,7 @@
                 <a:ea typeface="Ebrima"/>
                 <a:cs typeface="Ebrima"/>
               </a:rPr>
-              <a:t>አሃሃሃ የሁሉም የበላይ የሁሉም የበላይ እርሱ ነው (2x)</a:t>
+              <a:t>አሃሃሃ የሁሉም የበላይ የሁሉም የበላይ እርሱ ነው 2x</a:t>
             </a:r>
           </a:p>
         </p:txBody>
@@ -3993,7 +3993,7 @@
                 <a:ea typeface="Ebrima"/>
                 <a:cs typeface="Ebrima"/>
               </a:rPr>
-              <a:t>አዝ ነፍሴ ወደ እሱ አደላ (5x)</a:t>
+              <a:t>አዝ ነፍሴ ወደ እሱ አደላ 5x</a:t>
             </a:r>
           </a:p>
           <a:p>
@@ -4011,7 +4011,7 @@
                 <a:ea typeface="Ebrima"/>
                 <a:cs typeface="Ebrima"/>
               </a:rPr>
-              <a:t>ነፍሴ ለእርሱ ቅርብ ነው (5x)</a:t>
+              <a:t>ነፍሴ ለእርሱ ቅርብ ነው 5x</a:t>
             </a:r>
           </a:p>
           <a:p>
@@ -4271,7 +4271,7 @@
                 <a:ea typeface="Ebrima"/>
                 <a:cs typeface="Ebrima"/>
               </a:rPr>
-              <a:t>ነፍሴ ያደላው ለእርሱ ነው (2x)</a:t>
+              <a:t>ነፍሴ ያደላው ለእርሱ ነው 2x</a:t>
             </a:r>
           </a:p>
           <a:p>
@@ -4289,7 +4289,7 @@
                 <a:ea typeface="Ebrima"/>
                 <a:cs typeface="Ebrima"/>
               </a:rPr>
-              <a:t>ልቤ ያደላው ለእርሱ ነው (3x)</a:t>
+              <a:t>ልቤ ያደላው ለእርሱ ነው 3x</a:t>
             </a:r>
           </a:p>
         </p:txBody>
